--- a/apps/resources/bundled_files/4-klass-simmetriya-sabak.pptx
+++ b/apps/resources/bundled_files/4-klass-simmetriya-sabak.pptx
@@ -5196,7 +5196,7 @@
                 </a:solidFill>
                 <a:latin typeface="PT Sans"/>
               </a:rPr>
-              <a:t>4-класс · Математика</a:t>
+              <a:t/>
             </a:r>
           </a:p>
         </p:txBody>
@@ -5400,7 +5400,7 @@
                 </a:solidFill>
                 <a:latin typeface="PT Sans"/>
               </a:rPr>
-              <a:t>Китеп: Математика стандарты: 2-класс (симметрия, чагылдыруу), Cambridge Stage 4 (чакмак кагазда чагылдыруу жана жылдыруу). Мазмуну, сандары жана окуясы толук жаңы.</a:t>
+              <a:t>Китеп: Математика стандарты: 2-класс (симметрия, чагылдыруу), (чакмак кагазда чагылдыруу жана жылдыруу). Мазмуну, сандары жана окуясы толук жаңы.</a:t>
             </a:r>
           </a:p>
         </p:txBody>
@@ -5688,7 +5688,7 @@
                 </a:solidFill>
                 <a:latin typeface="PT Sans"/>
               </a:rPr>
-              <a:t>4-класс ›</a:t>
+              <a:t/>
             </a:r>
           </a:p>
           <a:p>
@@ -6621,7 +6621,7 @@
                 </a:solidFill>
                 <a:latin typeface="PT Sans"/>
               </a:rPr>
-              <a:t>4-класс ›</a:t>
+              <a:t/>
             </a:r>
           </a:p>
           <a:p>
@@ -9080,7 +9080,7 @@
                 </a:solidFill>
                 <a:latin typeface="PT Sans"/>
               </a:rPr>
-              <a:t>4-класс ›</a:t>
+              <a:t/>
             </a:r>
           </a:p>
           <a:p>
@@ -14185,7 +14185,7 @@
                 </a:solidFill>
                 <a:latin typeface="PT Sans"/>
               </a:rPr>
-              <a:t>4-класс ›</a:t>
+              <a:t/>
             </a:r>
           </a:p>
           <a:p>
@@ -15768,7 +15768,7 @@
                 </a:solidFill>
                 <a:latin typeface="PT Sans"/>
               </a:rPr>
-              <a:t>4-класс ›</a:t>
+              <a:t/>
             </a:r>
           </a:p>
           <a:p>
@@ -16519,7 +16519,7 @@
                 </a:solidFill>
                 <a:latin typeface="PT Sans"/>
               </a:rPr>
-              <a:t>4-класс ›</a:t>
+              <a:t/>
             </a:r>
           </a:p>
           <a:p>
@@ -17270,7 +17270,7 @@
                 </a:solidFill>
                 <a:latin typeface="PT Sans"/>
               </a:rPr>
-              <a:t>4-класс ›</a:t>
+              <a:t/>
             </a:r>
           </a:p>
           <a:p>
@@ -18819,7 +18819,7 @@
                 </a:solidFill>
                 <a:latin typeface="PT Sans"/>
               </a:rPr>
-              <a:t>4-класс ›</a:t>
+              <a:t/>
             </a:r>
           </a:p>
           <a:p>
@@ -19903,7 +19903,7 @@
                 </a:solidFill>
                 <a:latin typeface="PT Sans"/>
               </a:rPr>
-              <a:t>4-класс ›</a:t>
+              <a:t/>
             </a:r>
           </a:p>
           <a:p>
@@ -21433,7 +21433,7 @@
                 </a:solidFill>
                 <a:latin typeface="PT Sans"/>
               </a:rPr>
-              <a:t>4-класс ›</a:t>
+              <a:t/>
             </a:r>
           </a:p>
           <a:p>
@@ -23378,7 +23378,7 @@
                 </a:solidFill>
                 <a:latin typeface="PT Sans"/>
               </a:rPr>
-              <a:t>4-класс ›</a:t>
+              <a:t/>
             </a:r>
           </a:p>
           <a:p>
@@ -24655,7 +24655,7 @@
                 </a:solidFill>
                 <a:latin typeface="PT Sans"/>
               </a:rPr>
-              <a:t>4-класс ›</a:t>
+              <a:t/>
             </a:r>
           </a:p>
           <a:p>
@@ -26083,7 +26083,7 @@
                 </a:solidFill>
                 <a:latin typeface="PT Sans"/>
               </a:rPr>
-              <a:t>4-класс ›</a:t>
+              <a:t/>
             </a:r>
           </a:p>
           <a:p>
@@ -27539,7 +27539,7 @@
                 </a:solidFill>
                 <a:latin typeface="PT Sans"/>
               </a:rPr>
-              <a:t>4-класс ›</a:t>
+              <a:t/>
             </a:r>
           </a:p>
           <a:p>
@@ -28757,7 +28757,7 @@
                 </a:solidFill>
                 <a:latin typeface="PT Sans"/>
               </a:rPr>
-              <a:t>4-класс ›</a:t>
+              <a:t/>
             </a:r>
           </a:p>
           <a:p>
@@ -29557,7 +29557,7 @@
                 </a:solidFill>
                 <a:latin typeface="PT Sans"/>
               </a:rPr>
-              <a:t>4-класс ›</a:t>
+              <a:t/>
             </a:r>
           </a:p>
           <a:p>
@@ -30398,7 +30398,7 @@
                 </a:solidFill>
                 <a:latin typeface="PT Sans"/>
               </a:rPr>
-              <a:t>4-класс ›</a:t>
+              <a:t/>
             </a:r>
           </a:p>
           <a:p>
@@ -31347,7 +31347,7 @@
                 </a:solidFill>
                 <a:latin typeface="PT Sans"/>
               </a:rPr>
-              <a:t>4-класс ›</a:t>
+              <a:t/>
             </a:r>
           </a:p>
           <a:p>
@@ -32801,7 +32801,7 @@
                 </a:solidFill>
                 <a:latin typeface="PT Sans"/>
               </a:rPr>
-              <a:t>4-класс ›</a:t>
+              <a:t/>
             </a:r>
           </a:p>
           <a:p>
@@ -33547,7 +33547,7 @@
                 </a:solidFill>
                 <a:latin typeface="PT Sans"/>
               </a:rPr>
-              <a:t>4-класс ›</a:t>
+              <a:t/>
             </a:r>
           </a:p>
           <a:p>
@@ -34355,7 +34355,7 @@
                 </a:solidFill>
                 <a:latin typeface="PT Sans"/>
               </a:rPr>
-              <a:t>4-класс ›</a:t>
+              <a:t/>
             </a:r>
           </a:p>
           <a:p>
@@ -35546,7 +35546,7 @@
                 </a:solidFill>
                 <a:latin typeface="PT Sans"/>
               </a:rPr>
-              <a:t>4-класс ›</a:t>
+              <a:t/>
             </a:r>
           </a:p>
           <a:p>
@@ -36741,7 +36741,7 @@
                 </a:solidFill>
                 <a:latin typeface="PT Sans"/>
               </a:rPr>
-              <a:t>4-класс ›</a:t>
+              <a:t/>
             </a:r>
           </a:p>
           <a:p>
@@ -36922,7 +36922,7 @@
                 </a:solidFill>
                 <a:latin typeface="PT Sans"/>
               </a:rPr>
-              <a:t>2-класс</a:t>
+              <a:t/>
             </a:r>
           </a:p>
         </p:txBody>
@@ -37102,7 +37102,7 @@
                 </a:solidFill>
                 <a:latin typeface="PT Sans"/>
               </a:rPr>
-              <a:t>3-класс</a:t>
+              <a:t/>
             </a:r>
           </a:p>
         </p:txBody>
@@ -37282,7 +37282,7 @@
                 </a:solidFill>
                 <a:latin typeface="PT Sans"/>
               </a:rPr>
-              <a:t>4-класс</a:t>
+              <a:t/>
             </a:r>
           </a:p>
         </p:txBody>
@@ -37518,7 +37518,7 @@
                 </a:solidFill>
                 <a:latin typeface="PT Sans"/>
               </a:rPr>
-              <a:t>5–6-класс</a:t>
+              <a:t/>
             </a:r>
           </a:p>
         </p:txBody>
@@ -37938,7 +37938,7 @@
                 </a:solidFill>
                 <a:latin typeface="PT Sans"/>
               </a:rPr>
-              <a:t>4-класс ›</a:t>
+              <a:t/>
             </a:r>
           </a:p>
           <a:p>
@@ -39086,7 +39086,7 @@
                 </a:solidFill>
                 <a:latin typeface="PT Sans"/>
               </a:rPr>
-              <a:t>4-класс ›</a:t>
+              <a:t/>
             </a:r>
           </a:p>
           <a:p>

--- a/apps/resources/bundled_files/4-klass-simmetriya-sabak.pptx
+++ b/apps/resources/bundled_files/4-klass-simmetriya-sabak.pptx
@@ -1582,7 +1582,7 @@
           <a:lstStyle/>
           <a:p>
             <a:r>
-              <a:t>Ой жүгүртүү маданияты (Wenxi Lee, 2.6).</a:t>
+              <a:t>Ой жүгүртүү маданияты (Wenxi Lee, 2,6).</a:t>
             </a:r>
           </a:p>
         </p:txBody>
